--- a/Prezentacja-zalozen.pptx
+++ b/Prezentacja-zalozen.pptx
@@ -10,7 +10,8 @@
     <p:sldId id="258" r:id="rId4"/>
     <p:sldId id="259" r:id="rId5"/>
     <p:sldId id="260" r:id="rId6"/>
-    <p:sldId id="261" r:id="rId7"/>
+    <p:sldId id="262" r:id="rId7"/>
+    <p:sldId id="261" r:id="rId8"/>
   </p:sldIdLst>
   <p:sldSz cx="12192000" cy="6858000"/>
   <p:notesSz cx="6858000" cy="9144000"/>
@@ -109,6 +110,11 @@
       </a:defRPr>
     </a:lvl9pPr>
   </p:defaultTextStyle>
+  <p:extLst>
+    <p:ext uri="{EFAFB233-063F-42B5-8137-9DF3F51BA10A}">
+      <p15:sldGuideLst xmlns:p15="http://schemas.microsoft.com/office/powerpoint/2012/main"/>
+    </p:ext>
+  </p:extLst>
 </p:presentation>
 </file>
 
@@ -3825,6 +3831,128 @@
 </file>
 
 <file path=ppt/slides/slide6.xml><?xml version="1.0" encoding="utf-8"?>
+<p:sld xmlns:a="http://schemas.openxmlformats.org/drawingml/2006/main" xmlns:r="http://schemas.openxmlformats.org/officeDocument/2006/relationships" xmlns:p="http://schemas.openxmlformats.org/presentationml/2006/main">
+  <p:cSld>
+    <p:spTree>
+      <p:nvGrpSpPr>
+        <p:cNvPr id="1" name=""/>
+        <p:cNvGrpSpPr/>
+        <p:nvPr/>
+      </p:nvGrpSpPr>
+      <p:grpSpPr>
+        <a:xfrm>
+          <a:off x="0" y="0"/>
+          <a:ext cx="0" cy="0"/>
+          <a:chOff x="0" y="0"/>
+          <a:chExt cx="0" cy="0"/>
+        </a:xfrm>
+      </p:grpSpPr>
+      <p:sp>
+        <p:nvSpPr>
+          <p:cNvPr id="2" name="Tytuł 1">
+            <a:extLst>
+              <a:ext uri="{FF2B5EF4-FFF2-40B4-BE49-F238E27FC236}">
+                <a16:creationId xmlns:a16="http://schemas.microsoft.com/office/drawing/2014/main" id="{2CDF6723-7014-D59E-4C73-132C954E698A}"/>
+              </a:ext>
+            </a:extLst>
+          </p:cNvPr>
+          <p:cNvSpPr>
+            <a:spLocks noGrp="1"/>
+          </p:cNvSpPr>
+          <p:nvPr>
+            <p:ph type="title"/>
+          </p:nvPr>
+        </p:nvSpPr>
+        <p:spPr/>
+        <p:txBody>
+          <a:bodyPr/>
+          <a:lstStyle/>
+          <a:p>
+            <a:r>
+              <a:rPr lang="pl-PL" dirty="0"/>
+              <a:t>Interfejs użytkownika</a:t>
+            </a:r>
+          </a:p>
+        </p:txBody>
+      </p:sp>
+      <p:sp>
+        <p:nvSpPr>
+          <p:cNvPr id="3" name="Symbol zastępczy zawartości 2">
+            <a:extLst>
+              <a:ext uri="{FF2B5EF4-FFF2-40B4-BE49-F238E27FC236}">
+                <a16:creationId xmlns:a16="http://schemas.microsoft.com/office/drawing/2014/main" id="{D85F4388-65B1-3E90-FC5D-A228A8014D2E}"/>
+              </a:ext>
+            </a:extLst>
+          </p:cNvPr>
+          <p:cNvSpPr>
+            <a:spLocks noGrp="1"/>
+          </p:cNvSpPr>
+          <p:nvPr>
+            <p:ph idx="1"/>
+          </p:nvPr>
+        </p:nvSpPr>
+        <p:spPr/>
+        <p:txBody>
+          <a:bodyPr/>
+          <a:lstStyle/>
+          <a:p>
+            <a:r>
+              <a:rPr lang="pl-PL" dirty="0"/>
+              <a:t>Możliwość wyboru motywu</a:t>
+            </a:r>
+          </a:p>
+          <a:p>
+            <a:r>
+              <a:rPr lang="pl-PL" dirty="0"/>
+              <a:t>Strona główna z podsumowaniem</a:t>
+            </a:r>
+          </a:p>
+          <a:p>
+            <a:r>
+              <a:rPr lang="pl-PL" dirty="0"/>
+              <a:t>Strona z analizą – wykresy</a:t>
+            </a:r>
+          </a:p>
+          <a:p>
+            <a:r>
+              <a:rPr lang="pl-PL" dirty="0"/>
+              <a:t>Wykres kołowy przedstawiający procentowy podział na kategorie</a:t>
+            </a:r>
+          </a:p>
+          <a:p>
+            <a:r>
+              <a:rPr lang="pl-PL" dirty="0"/>
+              <a:t>Wykres liniowy porównujący wydatki oraz przychody</a:t>
+            </a:r>
+          </a:p>
+          <a:p>
+            <a:r>
+              <a:rPr lang="pl-PL" dirty="0"/>
+              <a:t>Widok portfela osobistego oraz rodzinnego</a:t>
+            </a:r>
+          </a:p>
+          <a:p>
+            <a:r>
+              <a:rPr lang="pl-PL" dirty="0"/>
+              <a:t>Przycisk przekierowujący do dodania wydatku ręcznie lub z paragonu</a:t>
+            </a:r>
+          </a:p>
+        </p:txBody>
+      </p:sp>
+    </p:spTree>
+    <p:extLst>
+      <p:ext uri="{BB962C8B-B14F-4D97-AF65-F5344CB8AC3E}">
+        <p14:creationId xmlns:p14="http://schemas.microsoft.com/office/powerpoint/2010/main" val="3147688082"/>
+      </p:ext>
+    </p:extLst>
+  </p:cSld>
+  <p:clrMapOvr>
+    <a:masterClrMapping/>
+  </p:clrMapOvr>
+</p:sld>
+</file>
+
+<file path=ppt/slides/slide7.xml><?xml version="1.0" encoding="utf-8"?>
 <p:sld xmlns:a="http://schemas.openxmlformats.org/drawingml/2006/main" xmlns:r="http://schemas.openxmlformats.org/officeDocument/2006/relationships" xmlns:p="http://schemas.openxmlformats.org/presentationml/2006/main">
   <p:cSld>
     <p:spTree>

--- a/Prezentacja-zalozen.pptx
+++ b/Prezentacja-zalozen.pptx
@@ -265,7 +265,7 @@
           <a:p>
             <a:fld id="{E0E85077-6AEA-4ED0-AE91-480E49AAB448}" type="datetimeFigureOut">
               <a:rPr lang="pl-PL" smtClean="0"/>
-              <a:t>18.05.2026</a:t>
+              <a:t>8.06.2026</a:t>
             </a:fld>
             <a:endParaRPr lang="pl-PL"/>
           </a:p>
@@ -463,7 +463,7 @@
           <a:p>
             <a:fld id="{E0E85077-6AEA-4ED0-AE91-480E49AAB448}" type="datetimeFigureOut">
               <a:rPr lang="pl-PL" smtClean="0"/>
-              <a:t>18.05.2026</a:t>
+              <a:t>8.06.2026</a:t>
             </a:fld>
             <a:endParaRPr lang="pl-PL"/>
           </a:p>
@@ -671,7 +671,7 @@
           <a:p>
             <a:fld id="{E0E85077-6AEA-4ED0-AE91-480E49AAB448}" type="datetimeFigureOut">
               <a:rPr lang="pl-PL" smtClean="0"/>
-              <a:t>18.05.2026</a:t>
+              <a:t>8.06.2026</a:t>
             </a:fld>
             <a:endParaRPr lang="pl-PL"/>
           </a:p>
@@ -869,7 +869,7 @@
           <a:p>
             <a:fld id="{E0E85077-6AEA-4ED0-AE91-480E49AAB448}" type="datetimeFigureOut">
               <a:rPr lang="pl-PL" smtClean="0"/>
-              <a:t>18.05.2026</a:t>
+              <a:t>8.06.2026</a:t>
             </a:fld>
             <a:endParaRPr lang="pl-PL"/>
           </a:p>
@@ -1144,7 +1144,7 @@
           <a:p>
             <a:fld id="{E0E85077-6AEA-4ED0-AE91-480E49AAB448}" type="datetimeFigureOut">
               <a:rPr lang="pl-PL" smtClean="0"/>
-              <a:t>18.05.2026</a:t>
+              <a:t>8.06.2026</a:t>
             </a:fld>
             <a:endParaRPr lang="pl-PL"/>
           </a:p>
@@ -1409,7 +1409,7 @@
           <a:p>
             <a:fld id="{E0E85077-6AEA-4ED0-AE91-480E49AAB448}" type="datetimeFigureOut">
               <a:rPr lang="pl-PL" smtClean="0"/>
-              <a:t>18.05.2026</a:t>
+              <a:t>8.06.2026</a:t>
             </a:fld>
             <a:endParaRPr lang="pl-PL"/>
           </a:p>
@@ -1821,7 +1821,7 @@
           <a:p>
             <a:fld id="{E0E85077-6AEA-4ED0-AE91-480E49AAB448}" type="datetimeFigureOut">
               <a:rPr lang="pl-PL" smtClean="0"/>
-              <a:t>18.05.2026</a:t>
+              <a:t>8.06.2026</a:t>
             </a:fld>
             <a:endParaRPr lang="pl-PL"/>
           </a:p>
@@ -1962,7 +1962,7 @@
           <a:p>
             <a:fld id="{E0E85077-6AEA-4ED0-AE91-480E49AAB448}" type="datetimeFigureOut">
               <a:rPr lang="pl-PL" smtClean="0"/>
-              <a:t>18.05.2026</a:t>
+              <a:t>8.06.2026</a:t>
             </a:fld>
             <a:endParaRPr lang="pl-PL"/>
           </a:p>
@@ -2075,7 +2075,7 @@
           <a:p>
             <a:fld id="{E0E85077-6AEA-4ED0-AE91-480E49AAB448}" type="datetimeFigureOut">
               <a:rPr lang="pl-PL" smtClean="0"/>
-              <a:t>18.05.2026</a:t>
+              <a:t>8.06.2026</a:t>
             </a:fld>
             <a:endParaRPr lang="pl-PL"/>
           </a:p>
@@ -2386,7 +2386,7 @@
           <a:p>
             <a:fld id="{E0E85077-6AEA-4ED0-AE91-480E49AAB448}" type="datetimeFigureOut">
               <a:rPr lang="pl-PL" smtClean="0"/>
-              <a:t>18.05.2026</a:t>
+              <a:t>8.06.2026</a:t>
             </a:fld>
             <a:endParaRPr lang="pl-PL"/>
           </a:p>
@@ -2674,7 +2674,7 @@
           <a:p>
             <a:fld id="{E0E85077-6AEA-4ED0-AE91-480E49AAB448}" type="datetimeFigureOut">
               <a:rPr lang="pl-PL" smtClean="0"/>
-              <a:t>18.05.2026</a:t>
+              <a:t>8.06.2026</a:t>
             </a:fld>
             <a:endParaRPr lang="pl-PL"/>
           </a:p>
@@ -2915,7 +2915,7 @@
           <a:p>
             <a:fld id="{E0E85077-6AEA-4ED0-AE91-480E49AAB448}" type="datetimeFigureOut">
               <a:rPr lang="pl-PL" smtClean="0"/>
-              <a:t>18.05.2026</a:t>
+              <a:t>8.06.2026</a:t>
             </a:fld>
             <a:endParaRPr lang="pl-PL"/>
           </a:p>
@@ -3589,7 +3589,11 @@
           </a:p>
           <a:p>
             <a:r>
-              <a:rPr lang="pl-PL" dirty="0"/>
+              <a:rPr lang="pl-PL" dirty="0">
+                <a:highlight>
+                  <a:srgbClr val="00FF00"/>
+                </a:highlight>
+              </a:rPr>
               <a:t>Analityka – podsumowania tygodniowe i miesięczne oraz porównanie wydatków z założonym limitem.</a:t>
             </a:r>
           </a:p>
@@ -3754,7 +3758,11 @@
           <a:lstStyle/>
           <a:p>
             <a:r>
-              <a:rPr lang="pl-PL" dirty="0"/>
+              <a:rPr lang="pl-PL" dirty="0">
+                <a:highlight>
+                  <a:srgbClr val="00FF00"/>
+                </a:highlight>
+              </a:rPr>
               <a:t>Skanowanie paragonów</a:t>
             </a:r>
           </a:p>
@@ -3903,7 +3911,11 @@
           </a:p>
           <a:p>
             <a:r>
-              <a:rPr lang="pl-PL" dirty="0"/>
+              <a:rPr lang="pl-PL" dirty="0">
+                <a:highlight>
+                  <a:srgbClr val="00FF00"/>
+                </a:highlight>
+              </a:rPr>
               <a:t>Strona główna z podsumowaniem</a:t>
             </a:r>
           </a:p>
@@ -3933,7 +3945,11 @@
           </a:p>
           <a:p>
             <a:r>
-              <a:rPr lang="pl-PL" dirty="0"/>
+              <a:rPr lang="pl-PL" dirty="0">
+                <a:highlight>
+                  <a:srgbClr val="00FF00"/>
+                </a:highlight>
+              </a:rPr>
               <a:t>Przycisk przekierowujący do dodania wydatku ręcznie lub z paragonu</a:t>
             </a:r>
           </a:p>

--- a/Prezentacja-zalozen.pptx
+++ b/Prezentacja-zalozen.pptx
@@ -265,7 +265,7 @@
           <a:p>
             <a:fld id="{E0E85077-6AEA-4ED0-AE91-480E49AAB448}" type="datetimeFigureOut">
               <a:rPr lang="pl-PL" smtClean="0"/>
-              <a:t>8.06.2026</a:t>
+              <a:t>9.06.2026</a:t>
             </a:fld>
             <a:endParaRPr lang="pl-PL"/>
           </a:p>
@@ -463,7 +463,7 @@
           <a:p>
             <a:fld id="{E0E85077-6AEA-4ED0-AE91-480E49AAB448}" type="datetimeFigureOut">
               <a:rPr lang="pl-PL" smtClean="0"/>
-              <a:t>8.06.2026</a:t>
+              <a:t>9.06.2026</a:t>
             </a:fld>
             <a:endParaRPr lang="pl-PL"/>
           </a:p>
@@ -671,7 +671,7 @@
           <a:p>
             <a:fld id="{E0E85077-6AEA-4ED0-AE91-480E49AAB448}" type="datetimeFigureOut">
               <a:rPr lang="pl-PL" smtClean="0"/>
-              <a:t>8.06.2026</a:t>
+              <a:t>9.06.2026</a:t>
             </a:fld>
             <a:endParaRPr lang="pl-PL"/>
           </a:p>
@@ -869,7 +869,7 @@
           <a:p>
             <a:fld id="{E0E85077-6AEA-4ED0-AE91-480E49AAB448}" type="datetimeFigureOut">
               <a:rPr lang="pl-PL" smtClean="0"/>
-              <a:t>8.06.2026</a:t>
+              <a:t>9.06.2026</a:t>
             </a:fld>
             <a:endParaRPr lang="pl-PL"/>
           </a:p>
@@ -1144,7 +1144,7 @@
           <a:p>
             <a:fld id="{E0E85077-6AEA-4ED0-AE91-480E49AAB448}" type="datetimeFigureOut">
               <a:rPr lang="pl-PL" smtClean="0"/>
-              <a:t>8.06.2026</a:t>
+              <a:t>9.06.2026</a:t>
             </a:fld>
             <a:endParaRPr lang="pl-PL"/>
           </a:p>
@@ -1409,7 +1409,7 @@
           <a:p>
             <a:fld id="{E0E85077-6AEA-4ED0-AE91-480E49AAB448}" type="datetimeFigureOut">
               <a:rPr lang="pl-PL" smtClean="0"/>
-              <a:t>8.06.2026</a:t>
+              <a:t>9.06.2026</a:t>
             </a:fld>
             <a:endParaRPr lang="pl-PL"/>
           </a:p>
@@ -1821,7 +1821,7 @@
           <a:p>
             <a:fld id="{E0E85077-6AEA-4ED0-AE91-480E49AAB448}" type="datetimeFigureOut">
               <a:rPr lang="pl-PL" smtClean="0"/>
-              <a:t>8.06.2026</a:t>
+              <a:t>9.06.2026</a:t>
             </a:fld>
             <a:endParaRPr lang="pl-PL"/>
           </a:p>
@@ -1962,7 +1962,7 @@
           <a:p>
             <a:fld id="{E0E85077-6AEA-4ED0-AE91-480E49AAB448}" type="datetimeFigureOut">
               <a:rPr lang="pl-PL" smtClean="0"/>
-              <a:t>8.06.2026</a:t>
+              <a:t>9.06.2026</a:t>
             </a:fld>
             <a:endParaRPr lang="pl-PL"/>
           </a:p>
@@ -2075,7 +2075,7 @@
           <a:p>
             <a:fld id="{E0E85077-6AEA-4ED0-AE91-480E49AAB448}" type="datetimeFigureOut">
               <a:rPr lang="pl-PL" smtClean="0"/>
-              <a:t>8.06.2026</a:t>
+              <a:t>9.06.2026</a:t>
             </a:fld>
             <a:endParaRPr lang="pl-PL"/>
           </a:p>
@@ -2386,7 +2386,7 @@
           <a:p>
             <a:fld id="{E0E85077-6AEA-4ED0-AE91-480E49AAB448}" type="datetimeFigureOut">
               <a:rPr lang="pl-PL" smtClean="0"/>
-              <a:t>8.06.2026</a:t>
+              <a:t>9.06.2026</a:t>
             </a:fld>
             <a:endParaRPr lang="pl-PL"/>
           </a:p>
@@ -2674,7 +2674,7 @@
           <a:p>
             <a:fld id="{E0E85077-6AEA-4ED0-AE91-480E49AAB448}" type="datetimeFigureOut">
               <a:rPr lang="pl-PL" smtClean="0"/>
-              <a:t>8.06.2026</a:t>
+              <a:t>9.06.2026</a:t>
             </a:fld>
             <a:endParaRPr lang="pl-PL"/>
           </a:p>
@@ -2915,7 +2915,7 @@
           <a:p>
             <a:fld id="{E0E85077-6AEA-4ED0-AE91-480E49AAB448}" type="datetimeFigureOut">
               <a:rPr lang="pl-PL" smtClean="0"/>
-              <a:t>8.06.2026</a:t>
+              <a:t>9.06.2026</a:t>
             </a:fld>
             <a:endParaRPr lang="pl-PL"/>
           </a:p>
@@ -3685,7 +3685,11 @@
           <a:lstStyle/>
           <a:p>
             <a:r>
-              <a:rPr lang="pl-PL" dirty="0"/>
+              <a:rPr lang="pl-PL" dirty="0">
+                <a:highlight>
+                  <a:srgbClr val="00FF00"/>
+                </a:highlight>
+              </a:rPr>
               <a:t>Dodawanie użytkowników do grupy.</a:t>
             </a:r>
           </a:p>
@@ -3793,33 +3797,57 @@
               <a:buNone/>
             </a:pPr>
             <a:r>
-              <a:rPr lang="pl-PL" dirty="0"/>
+              <a:rPr lang="pl-PL" dirty="0">
+                <a:highlight>
+                  <a:srgbClr val="00FF00"/>
+                </a:highlight>
+              </a:rPr>
               <a:t>Wykorzystanie </a:t>
             </a:r>
             <a:r>
-              <a:rPr lang="en-US" dirty="0"/>
+              <a:rPr lang="en-US" dirty="0">
+                <a:highlight>
+                  <a:srgbClr val="00FF00"/>
+                </a:highlight>
+              </a:rPr>
               <a:t>Google ML Kit </a:t>
             </a:r>
             <a:r>
-              <a:rPr lang="pl-PL" dirty="0"/>
+              <a:rPr lang="pl-PL" dirty="0">
+                <a:highlight>
+                  <a:srgbClr val="00FF00"/>
+                </a:highlight>
+              </a:rPr>
               <a:t>do rozpoznawania tekstu na paragonie. W założeniu, system będzie automatycznie rozpoznawał:</a:t>
             </a:r>
           </a:p>
           <a:p>
             <a:r>
-              <a:rPr lang="pl-PL" dirty="0"/>
+              <a:rPr lang="pl-PL" dirty="0">
+                <a:highlight>
+                  <a:srgbClr val="00FF00"/>
+                </a:highlight>
+              </a:rPr>
               <a:t>całkowitą kwotę,</a:t>
             </a:r>
           </a:p>
           <a:p>
             <a:r>
-              <a:rPr lang="pl-PL" dirty="0"/>
+              <a:rPr lang="pl-PL" dirty="0">
+                <a:highlight>
+                  <a:srgbClr val="00FF00"/>
+                </a:highlight>
+              </a:rPr>
               <a:t>datę zakupu,</a:t>
             </a:r>
           </a:p>
           <a:p>
             <a:r>
-              <a:rPr lang="pl-PL" dirty="0"/>
+              <a:rPr lang="pl-PL" dirty="0">
+                <a:highlight>
+                  <a:srgbClr val="00FF00"/>
+                </a:highlight>
+              </a:rPr>
               <a:t>nazwę sklepu.</a:t>
             </a:r>
           </a:p>

--- a/Prezentacja-zalozen.pptx
+++ b/Prezentacja-zalozen.pptx
@@ -265,7 +265,7 @@
           <a:p>
             <a:fld id="{E0E85077-6AEA-4ED0-AE91-480E49AAB448}" type="datetimeFigureOut">
               <a:rPr lang="pl-PL" smtClean="0"/>
-              <a:t>9.06.2026</a:t>
+              <a:t>10.06.2026</a:t>
             </a:fld>
             <a:endParaRPr lang="pl-PL"/>
           </a:p>
@@ -463,7 +463,7 @@
           <a:p>
             <a:fld id="{E0E85077-6AEA-4ED0-AE91-480E49AAB448}" type="datetimeFigureOut">
               <a:rPr lang="pl-PL" smtClean="0"/>
-              <a:t>9.06.2026</a:t>
+              <a:t>10.06.2026</a:t>
             </a:fld>
             <a:endParaRPr lang="pl-PL"/>
           </a:p>
@@ -671,7 +671,7 @@
           <a:p>
             <a:fld id="{E0E85077-6AEA-4ED0-AE91-480E49AAB448}" type="datetimeFigureOut">
               <a:rPr lang="pl-PL" smtClean="0"/>
-              <a:t>9.06.2026</a:t>
+              <a:t>10.06.2026</a:t>
             </a:fld>
             <a:endParaRPr lang="pl-PL"/>
           </a:p>
@@ -869,7 +869,7 @@
           <a:p>
             <a:fld id="{E0E85077-6AEA-4ED0-AE91-480E49AAB448}" type="datetimeFigureOut">
               <a:rPr lang="pl-PL" smtClean="0"/>
-              <a:t>9.06.2026</a:t>
+              <a:t>10.06.2026</a:t>
             </a:fld>
             <a:endParaRPr lang="pl-PL"/>
           </a:p>
@@ -1144,7 +1144,7 @@
           <a:p>
             <a:fld id="{E0E85077-6AEA-4ED0-AE91-480E49AAB448}" type="datetimeFigureOut">
               <a:rPr lang="pl-PL" smtClean="0"/>
-              <a:t>9.06.2026</a:t>
+              <a:t>10.06.2026</a:t>
             </a:fld>
             <a:endParaRPr lang="pl-PL"/>
           </a:p>
@@ -1409,7 +1409,7 @@
           <a:p>
             <a:fld id="{E0E85077-6AEA-4ED0-AE91-480E49AAB448}" type="datetimeFigureOut">
               <a:rPr lang="pl-PL" smtClean="0"/>
-              <a:t>9.06.2026</a:t>
+              <a:t>10.06.2026</a:t>
             </a:fld>
             <a:endParaRPr lang="pl-PL"/>
           </a:p>
@@ -1821,7 +1821,7 @@
           <a:p>
             <a:fld id="{E0E85077-6AEA-4ED0-AE91-480E49AAB448}" type="datetimeFigureOut">
               <a:rPr lang="pl-PL" smtClean="0"/>
-              <a:t>9.06.2026</a:t>
+              <a:t>10.06.2026</a:t>
             </a:fld>
             <a:endParaRPr lang="pl-PL"/>
           </a:p>
@@ -1962,7 +1962,7 @@
           <a:p>
             <a:fld id="{E0E85077-6AEA-4ED0-AE91-480E49AAB448}" type="datetimeFigureOut">
               <a:rPr lang="pl-PL" smtClean="0"/>
-              <a:t>9.06.2026</a:t>
+              <a:t>10.06.2026</a:t>
             </a:fld>
             <a:endParaRPr lang="pl-PL"/>
           </a:p>
@@ -2075,7 +2075,7 @@
           <a:p>
             <a:fld id="{E0E85077-6AEA-4ED0-AE91-480E49AAB448}" type="datetimeFigureOut">
               <a:rPr lang="pl-PL" smtClean="0"/>
-              <a:t>9.06.2026</a:t>
+              <a:t>10.06.2026</a:t>
             </a:fld>
             <a:endParaRPr lang="pl-PL"/>
           </a:p>
@@ -2386,7 +2386,7 @@
           <a:p>
             <a:fld id="{E0E85077-6AEA-4ED0-AE91-480E49AAB448}" type="datetimeFigureOut">
               <a:rPr lang="pl-PL" smtClean="0"/>
-              <a:t>9.06.2026</a:t>
+              <a:t>10.06.2026</a:t>
             </a:fld>
             <a:endParaRPr lang="pl-PL"/>
           </a:p>
@@ -2674,7 +2674,7 @@
           <a:p>
             <a:fld id="{E0E85077-6AEA-4ED0-AE91-480E49AAB448}" type="datetimeFigureOut">
               <a:rPr lang="pl-PL" smtClean="0"/>
-              <a:t>9.06.2026</a:t>
+              <a:t>10.06.2026</a:t>
             </a:fld>
             <a:endParaRPr lang="pl-PL"/>
           </a:p>
@@ -2915,7 +2915,7 @@
           <a:p>
             <a:fld id="{E0E85077-6AEA-4ED0-AE91-480E49AAB448}" type="datetimeFigureOut">
               <a:rPr lang="pl-PL" smtClean="0"/>
-              <a:t>9.06.2026</a:t>
+              <a:t>10.06.2026</a:t>
             </a:fld>
             <a:endParaRPr lang="pl-PL"/>
           </a:p>
@@ -3584,7 +3584,27 @@
           <a:p>
             <a:r>
               <a:rPr lang="pl-PL" dirty="0"/>
-              <a:t>Kategoryzacja – podział na wydatki/przychody stałe i jednorazowe. Precyzyjne filtrowanie i wyszukiwanie kosztów.</a:t>
+              <a:t>Kategoryzacja – </a:t>
+            </a:r>
+            <a:r>
+              <a:rPr lang="pl-PL" dirty="0">
+                <a:highlight>
+                  <a:srgbClr val="00FF00"/>
+                </a:highlight>
+              </a:rPr>
+              <a:t>podział na wydatki</a:t>
+            </a:r>
+            <a:r>
+              <a:rPr lang="pl-PL" dirty="0"/>
+              <a:t>/przychody stałe i jednorazowe. </a:t>
+            </a:r>
+            <a:r>
+              <a:rPr lang="pl-PL" dirty="0">
+                <a:highlight>
+                  <a:srgbClr val="00FF00"/>
+                </a:highlight>
+              </a:rPr>
+              <a:t>Precyzyjne filtrowanie i wyszukiwanie kosztów.</a:t>
             </a:r>
           </a:p>
           <a:p>
@@ -3695,7 +3715,11 @@
           </a:p>
           <a:p>
             <a:r>
-              <a:rPr lang="pl-PL" dirty="0"/>
+              <a:rPr lang="pl-PL" dirty="0">
+                <a:highlight>
+                  <a:srgbClr val="00FF00"/>
+                </a:highlight>
+              </a:rPr>
               <a:t>Podgląd wydatków wszystkich członków.</a:t>
             </a:r>
           </a:p>
@@ -3968,7 +3992,15 @@
           <a:p>
             <a:r>
               <a:rPr lang="pl-PL" dirty="0"/>
-              <a:t>Widok portfela osobistego oraz rodzinnego</a:t>
+              <a:t>Widok portfela osobistego oraz rodzinnego </a:t>
+            </a:r>
+            <a:r>
+              <a:rPr lang="pl-PL" dirty="0">
+                <a:highlight>
+                  <a:srgbClr val="00FF00"/>
+                </a:highlight>
+              </a:rPr>
+              <a:t>(zrobione dla wydatków)</a:t>
             </a:r>
           </a:p>
           <a:p>

--- a/Prezentacja-zalozen.pptx
+++ b/Prezentacja-zalozen.pptx
@@ -265,7 +265,7 @@
           <a:p>
             <a:fld id="{E0E85077-6AEA-4ED0-AE91-480E49AAB448}" type="datetimeFigureOut">
               <a:rPr lang="pl-PL" smtClean="0"/>
-              <a:t>10.06.2026</a:t>
+              <a:t>11.06.2026</a:t>
             </a:fld>
             <a:endParaRPr lang="pl-PL"/>
           </a:p>
@@ -463,7 +463,7 @@
           <a:p>
             <a:fld id="{E0E85077-6AEA-4ED0-AE91-480E49AAB448}" type="datetimeFigureOut">
               <a:rPr lang="pl-PL" smtClean="0"/>
-              <a:t>10.06.2026</a:t>
+              <a:t>11.06.2026</a:t>
             </a:fld>
             <a:endParaRPr lang="pl-PL"/>
           </a:p>
@@ -671,7 +671,7 @@
           <a:p>
             <a:fld id="{E0E85077-6AEA-4ED0-AE91-480E49AAB448}" type="datetimeFigureOut">
               <a:rPr lang="pl-PL" smtClean="0"/>
-              <a:t>10.06.2026</a:t>
+              <a:t>11.06.2026</a:t>
             </a:fld>
             <a:endParaRPr lang="pl-PL"/>
           </a:p>
@@ -869,7 +869,7 @@
           <a:p>
             <a:fld id="{E0E85077-6AEA-4ED0-AE91-480E49AAB448}" type="datetimeFigureOut">
               <a:rPr lang="pl-PL" smtClean="0"/>
-              <a:t>10.06.2026</a:t>
+              <a:t>11.06.2026</a:t>
             </a:fld>
             <a:endParaRPr lang="pl-PL"/>
           </a:p>
@@ -1144,7 +1144,7 @@
           <a:p>
             <a:fld id="{E0E85077-6AEA-4ED0-AE91-480E49AAB448}" type="datetimeFigureOut">
               <a:rPr lang="pl-PL" smtClean="0"/>
-              <a:t>10.06.2026</a:t>
+              <a:t>11.06.2026</a:t>
             </a:fld>
             <a:endParaRPr lang="pl-PL"/>
           </a:p>
@@ -1409,7 +1409,7 @@
           <a:p>
             <a:fld id="{E0E85077-6AEA-4ED0-AE91-480E49AAB448}" type="datetimeFigureOut">
               <a:rPr lang="pl-PL" smtClean="0"/>
-              <a:t>10.06.2026</a:t>
+              <a:t>11.06.2026</a:t>
             </a:fld>
             <a:endParaRPr lang="pl-PL"/>
           </a:p>
@@ -1821,7 +1821,7 @@
           <a:p>
             <a:fld id="{E0E85077-6AEA-4ED0-AE91-480E49AAB448}" type="datetimeFigureOut">
               <a:rPr lang="pl-PL" smtClean="0"/>
-              <a:t>10.06.2026</a:t>
+              <a:t>11.06.2026</a:t>
             </a:fld>
             <a:endParaRPr lang="pl-PL"/>
           </a:p>
@@ -1962,7 +1962,7 @@
           <a:p>
             <a:fld id="{E0E85077-6AEA-4ED0-AE91-480E49AAB448}" type="datetimeFigureOut">
               <a:rPr lang="pl-PL" smtClean="0"/>
-              <a:t>10.06.2026</a:t>
+              <a:t>11.06.2026</a:t>
             </a:fld>
             <a:endParaRPr lang="pl-PL"/>
           </a:p>
@@ -2075,7 +2075,7 @@
           <a:p>
             <a:fld id="{E0E85077-6AEA-4ED0-AE91-480E49AAB448}" type="datetimeFigureOut">
               <a:rPr lang="pl-PL" smtClean="0"/>
-              <a:t>10.06.2026</a:t>
+              <a:t>11.06.2026</a:t>
             </a:fld>
             <a:endParaRPr lang="pl-PL"/>
           </a:p>
@@ -2386,7 +2386,7 @@
           <a:p>
             <a:fld id="{E0E85077-6AEA-4ED0-AE91-480E49AAB448}" type="datetimeFigureOut">
               <a:rPr lang="pl-PL" smtClean="0"/>
-              <a:t>10.06.2026</a:t>
+              <a:t>11.06.2026</a:t>
             </a:fld>
             <a:endParaRPr lang="pl-PL"/>
           </a:p>
@@ -2674,7 +2674,7 @@
           <a:p>
             <a:fld id="{E0E85077-6AEA-4ED0-AE91-480E49AAB448}" type="datetimeFigureOut">
               <a:rPr lang="pl-PL" smtClean="0"/>
-              <a:t>10.06.2026</a:t>
+              <a:t>11.06.2026</a:t>
             </a:fld>
             <a:endParaRPr lang="pl-PL"/>
           </a:p>
@@ -2915,7 +2915,7 @@
           <a:p>
             <a:fld id="{E0E85077-6AEA-4ED0-AE91-480E49AAB448}" type="datetimeFigureOut">
               <a:rPr lang="pl-PL" smtClean="0"/>
-              <a:t>10.06.2026</a:t>
+              <a:t>11.06.2026</a:t>
             </a:fld>
             <a:endParaRPr lang="pl-PL"/>
           </a:p>
@@ -3595,7 +3595,11 @@
               <a:t>podział na wydatki</a:t>
             </a:r>
             <a:r>
-              <a:rPr lang="pl-PL" dirty="0"/>
+              <a:rPr lang="pl-PL" dirty="0">
+                <a:highlight>
+                  <a:srgbClr val="008000"/>
+                </a:highlight>
+              </a:rPr>
               <a:t>/przychody stałe i jednorazowe. </a:t>
             </a:r>
             <a:r>
@@ -3957,7 +3961,11 @@
           <a:lstStyle/>
           <a:p>
             <a:r>
-              <a:rPr lang="pl-PL" dirty="0"/>
+              <a:rPr lang="pl-PL" dirty="0">
+                <a:highlight>
+                  <a:srgbClr val="008000"/>
+                </a:highlight>
+              </a:rPr>
               <a:t>Możliwość wyboru motywu</a:t>
             </a:r>
           </a:p>

--- a/Prezentacja-zalozen.pptx
+++ b/Prezentacja-zalozen.pptx
@@ -265,7 +265,7 @@
           <a:p>
             <a:fld id="{E0E85077-6AEA-4ED0-AE91-480E49AAB448}" type="datetimeFigureOut">
               <a:rPr lang="pl-PL" smtClean="0"/>
-              <a:t>11.06.2026</a:t>
+              <a:t>14.06.2026</a:t>
             </a:fld>
             <a:endParaRPr lang="pl-PL"/>
           </a:p>
@@ -463,7 +463,7 @@
           <a:p>
             <a:fld id="{E0E85077-6AEA-4ED0-AE91-480E49AAB448}" type="datetimeFigureOut">
               <a:rPr lang="pl-PL" smtClean="0"/>
-              <a:t>11.06.2026</a:t>
+              <a:t>14.06.2026</a:t>
             </a:fld>
             <a:endParaRPr lang="pl-PL"/>
           </a:p>
@@ -671,7 +671,7 @@
           <a:p>
             <a:fld id="{E0E85077-6AEA-4ED0-AE91-480E49AAB448}" type="datetimeFigureOut">
               <a:rPr lang="pl-PL" smtClean="0"/>
-              <a:t>11.06.2026</a:t>
+              <a:t>14.06.2026</a:t>
             </a:fld>
             <a:endParaRPr lang="pl-PL"/>
           </a:p>
@@ -869,7 +869,7 @@
           <a:p>
             <a:fld id="{E0E85077-6AEA-4ED0-AE91-480E49AAB448}" type="datetimeFigureOut">
               <a:rPr lang="pl-PL" smtClean="0"/>
-              <a:t>11.06.2026</a:t>
+              <a:t>14.06.2026</a:t>
             </a:fld>
             <a:endParaRPr lang="pl-PL"/>
           </a:p>
@@ -1144,7 +1144,7 @@
           <a:p>
             <a:fld id="{E0E85077-6AEA-4ED0-AE91-480E49AAB448}" type="datetimeFigureOut">
               <a:rPr lang="pl-PL" smtClean="0"/>
-              <a:t>11.06.2026</a:t>
+              <a:t>14.06.2026</a:t>
             </a:fld>
             <a:endParaRPr lang="pl-PL"/>
           </a:p>
@@ -1409,7 +1409,7 @@
           <a:p>
             <a:fld id="{E0E85077-6AEA-4ED0-AE91-480E49AAB448}" type="datetimeFigureOut">
               <a:rPr lang="pl-PL" smtClean="0"/>
-              <a:t>11.06.2026</a:t>
+              <a:t>14.06.2026</a:t>
             </a:fld>
             <a:endParaRPr lang="pl-PL"/>
           </a:p>
@@ -1821,7 +1821,7 @@
           <a:p>
             <a:fld id="{E0E85077-6AEA-4ED0-AE91-480E49AAB448}" type="datetimeFigureOut">
               <a:rPr lang="pl-PL" smtClean="0"/>
-              <a:t>11.06.2026</a:t>
+              <a:t>14.06.2026</a:t>
             </a:fld>
             <a:endParaRPr lang="pl-PL"/>
           </a:p>
@@ -1962,7 +1962,7 @@
           <a:p>
             <a:fld id="{E0E85077-6AEA-4ED0-AE91-480E49AAB448}" type="datetimeFigureOut">
               <a:rPr lang="pl-PL" smtClean="0"/>
-              <a:t>11.06.2026</a:t>
+              <a:t>14.06.2026</a:t>
             </a:fld>
             <a:endParaRPr lang="pl-PL"/>
           </a:p>
@@ -2075,7 +2075,7 @@
           <a:p>
             <a:fld id="{E0E85077-6AEA-4ED0-AE91-480E49AAB448}" type="datetimeFigureOut">
               <a:rPr lang="pl-PL" smtClean="0"/>
-              <a:t>11.06.2026</a:t>
+              <a:t>14.06.2026</a:t>
             </a:fld>
             <a:endParaRPr lang="pl-PL"/>
           </a:p>
@@ -2386,7 +2386,7 @@
           <a:p>
             <a:fld id="{E0E85077-6AEA-4ED0-AE91-480E49AAB448}" type="datetimeFigureOut">
               <a:rPr lang="pl-PL" smtClean="0"/>
-              <a:t>11.06.2026</a:t>
+              <a:t>14.06.2026</a:t>
             </a:fld>
             <a:endParaRPr lang="pl-PL"/>
           </a:p>
@@ -2674,7 +2674,7 @@
           <a:p>
             <a:fld id="{E0E85077-6AEA-4ED0-AE91-480E49AAB448}" type="datetimeFigureOut">
               <a:rPr lang="pl-PL" smtClean="0"/>
-              <a:t>11.06.2026</a:t>
+              <a:t>14.06.2026</a:t>
             </a:fld>
             <a:endParaRPr lang="pl-PL"/>
           </a:p>
@@ -2915,7 +2915,7 @@
           <a:p>
             <a:fld id="{E0E85077-6AEA-4ED0-AE91-480E49AAB448}" type="datetimeFigureOut">
               <a:rPr lang="pl-PL" smtClean="0"/>
-              <a:t>11.06.2026</a:t>
+              <a:t>14.06.2026</a:t>
             </a:fld>
             <a:endParaRPr lang="pl-PL"/>
           </a:p>
@@ -3981,25 +3981,41 @@
           </a:p>
           <a:p>
             <a:r>
-              <a:rPr lang="pl-PL" dirty="0"/>
+              <a:rPr lang="pl-PL" dirty="0">
+                <a:highlight>
+                  <a:srgbClr val="008000"/>
+                </a:highlight>
+              </a:rPr>
               <a:t>Strona z analizą – wykresy</a:t>
             </a:r>
           </a:p>
           <a:p>
             <a:r>
-              <a:rPr lang="pl-PL" dirty="0"/>
+              <a:rPr lang="pl-PL" dirty="0">
+                <a:highlight>
+                  <a:srgbClr val="008000"/>
+                </a:highlight>
+              </a:rPr>
               <a:t>Wykres kołowy przedstawiający procentowy podział na kategorie</a:t>
             </a:r>
           </a:p>
           <a:p>
             <a:r>
-              <a:rPr lang="pl-PL" dirty="0"/>
+              <a:rPr lang="pl-PL" dirty="0">
+                <a:highlight>
+                  <a:srgbClr val="008000"/>
+                </a:highlight>
+              </a:rPr>
               <a:t>Wykres liniowy porównujący wydatki oraz przychody</a:t>
             </a:r>
           </a:p>
           <a:p>
             <a:r>
-              <a:rPr lang="pl-PL" dirty="0"/>
+              <a:rPr lang="pl-PL" dirty="0">
+                <a:highlight>
+                  <a:srgbClr val="008000"/>
+                </a:highlight>
+              </a:rPr>
               <a:t>Widok portfela osobistego oraz rodzinnego </a:t>
             </a:r>
             <a:r>

--- a/Prezentacja-zalozen.pptx
+++ b/Prezentacja-zalozen.pptx
@@ -3623,8 +3623,24 @@
           </a:p>
           <a:p>
             <a:r>
+              <a:rPr lang="pl-PL" dirty="0">
+                <a:highlight>
+                  <a:srgbClr val="008000"/>
+                </a:highlight>
+              </a:rPr>
+              <a:t>Mapa sklepów </a:t>
+            </a:r>
+            <a:r>
               <a:rPr lang="pl-PL" dirty="0"/>
-              <a:t>Mapa sklepów oraz listy zakupowe – podsumowanie wydatków w danym sklepie.</a:t>
+              <a:t>oraz listy zakupowe – </a:t>
+            </a:r>
+            <a:r>
+              <a:rPr lang="pl-PL" dirty="0">
+                <a:highlight>
+                  <a:srgbClr val="008000"/>
+                </a:highlight>
+              </a:rPr>
+              <a:t>podsumowanie wydatków w danym sklepie.</a:t>
             </a:r>
           </a:p>
         </p:txBody>

--- a/Prezentacja-zalozen.pptx
+++ b/Prezentacja-zalozen.pptx
@@ -3632,7 +3632,19 @@
             </a:r>
             <a:r>
               <a:rPr lang="pl-PL" dirty="0"/>
-              <a:t>oraz listy zakupowe – </a:t>
+              <a:t>oraz </a:t>
+            </a:r>
+            <a:r>
+              <a:rPr lang="pl-PL" dirty="0">
+                <a:highlight>
+                  <a:srgbClr val="008000"/>
+                </a:highlight>
+              </a:rPr>
+              <a:t>listy zakupowe </a:t>
+            </a:r>
+            <a:r>
+              <a:rPr lang="pl-PL" dirty="0"/>
+              <a:t>– </a:t>
             </a:r>
             <a:r>
               <a:rPr lang="pl-PL" dirty="0">
@@ -3745,8 +3757,16 @@
           </a:p>
           <a:p>
             <a:r>
+              <a:rPr lang="pl-PL" dirty="0">
+                <a:highlight>
+                  <a:srgbClr val="008000"/>
+                </a:highlight>
+              </a:rPr>
+              <a:t>Wspólne cele finansowe, oszczędzanie</a:t>
+            </a:r>
+            <a:r>
               <a:rPr lang="pl-PL" dirty="0"/>
-              <a:t>Wspólne cele finansowe, oszczędzanie.</a:t>
+              <a:t>.</a:t>
             </a:r>
           </a:p>
           <a:p>
